--- a/apps/api/src/learning/extract/fixtures/deploiement.pptx
+++ b/apps/api/src/learning/extract/fixtures/deploiement.pptx
@@ -752,6 +752,66 @@
 </p:sldLayout>
 </file>
 
+<file path=ppt/slideLayouts/slideLayout2.xml><?xml version="1.0" encoding="utf-8"?>
+<p:sldLayout xmlns:a="http://schemas.openxmlformats.org/drawingml/2006/main" xmlns:r="http://schemas.openxmlformats.org/officeDocument/2006/relationships" xmlns:p="http://schemas.openxmlformats.org/presentationml/2006/main" preserve="1">
+  <p:cSld name="TITRE">
+    <p:spTree>
+      <p:nvGrpSpPr>
+        <p:cNvPr id="1" name=""/>
+        <p:cNvGrpSpPr/>
+        <p:nvPr/>
+      </p:nvGrpSpPr>
+      <p:grpSpPr>
+        <a:xfrm>
+          <a:off x="0" y="0"/>
+          <a:ext cx="0" cy="0"/>
+          <a:chOff x="0" y="0"/>
+          <a:chExt cx="0" cy="0"/>
+        </a:xfrm>
+      </p:grpSpPr>
+      <p:sp>
+        <p:nvSpPr>
+          <p:cNvPr id="2" name="Text 0"/>
+          <p:cNvSpPr/>
+          <p:nvPr>
+            <p:ph idx="100" type="title" hasCustomPrompt="1"/>
+          </p:nvPr>
+        </p:nvSpPr>
+        <p:spPr>
+          <a:xfrm>
+            <a:off x="457200" y="365760"/>
+            <a:ext cx="8229600" cy="914400"/>
+          </a:xfrm>
+          <a:prstGeom prst="rect">
+            <a:avLst/>
+          </a:prstGeom>
+          <a:noFill/>
+          <a:ln/>
+        </p:spPr>
+        <p:txBody>
+          <a:bodyPr wrap="square" rtlCol="0"/>
+          <a:lstStyle>
+            <a:lvl1pPr indent="0" marL="0">
+              <a:buNone/>
+              <a:defRPr lang="en-US" dirty="0"/>
+            </a:lvl1pPr>
+          </a:lstStyle>
+          <a:p>
+            <a:pPr indent="0" marL="0">
+              <a:buNone/>
+            </a:pPr>
+            <a:endParaRPr lang="en-US" dirty="0"/>
+          </a:p>
+        </p:txBody>
+      </p:sp>
+    </p:spTree>
+  </p:cSld>
+  <p:clrMapOvr>
+    <a:masterClrMapping/>
+  </p:clrMapOvr>
+</p:sldLayout>
+</file>
+
 <file path=ppt/slideMasters/slideMaster1.xml><?xml version="1.0" encoding="utf-8"?>
 <p:sldMaster xmlns:a="http://schemas.openxmlformats.org/drawingml/2006/main" xmlns:r="http://schemas.openxmlformats.org/officeDocument/2006/relationships" xmlns:p="http://schemas.openxmlformats.org/presentationml/2006/main">
   <p:cSld>
@@ -774,6 +834,7 @@
   <p:clrMap bg1="lt1" tx1="dk1" bg2="lt2" tx2="dk2" accent1="accent1" accent2="accent2" accent3="accent3" accent4="accent4" accent5="accent5" accent6="accent6" hlink="hlink" folHlink="folHlink"/>
   <p:sldLayoutIdLst>
     <p:sldLayoutId id="2147483649" r:id="rId1"/>
+    <p:sldLayoutId id="2147483650" r:id="rId2"/>
   </p:sldLayoutIdLst>
   <p:hf sldNum="0" hdr="0" ftr="0" dt="0"/>
   <p:txStyles>
@@ -1050,11 +1111,13 @@
         <p:nvSpPr>
           <p:cNvPr id="2" name="Text 0"/>
           <p:cNvSpPr/>
-          <p:nvPr/>
+          <p:nvPr>
+            <p:ph idx="100" type="title" hasCustomPrompt="1"/>
+          </p:nvPr>
         </p:nvSpPr>
         <p:spPr>
           <a:xfrm>
-            <a:off x="457200" y="457200"/>
+            <a:off x="457200" y="365760"/>
             <a:ext cx="8229600" cy="914400"/>
           </a:xfrm>
           <a:prstGeom prst="rect">
@@ -1064,21 +1127,17 @@
           <a:ln/>
         </p:spPr>
         <p:txBody>
-          <a:bodyPr wrap="square" rtlCol="0" anchor="ctr"/>
+          <a:bodyPr wrap="square" rtlCol="0"/>
           <a:lstStyle/>
           <a:p>
             <a:pPr indent="0" marL="0">
               <a:buNone/>
             </a:pPr>
             <a:r>
-              <a:rPr lang="en-US" sz="3200" dirty="0">
-                <a:solidFill>
-                  <a:srgbClr val="000000"/>
-                </a:solidFill>
-              </a:rPr>
+              <a:rPr lang="en-US" dirty="0"/>
               <a:t>Plan de déploiement</a:t>
             </a:r>
-            <a:endParaRPr lang="en-US" sz="3200" dirty="0"/>
+            <a:endParaRPr lang="en-US" dirty="0"/>
           </a:p>
         </p:txBody>
       </p:sp>
